--- a/IV_Openstack Cloud Architecture.pptx
+++ b/IV_Openstack Cloud Architecture.pptx
@@ -5,7 +5,7 @@
     <p:sldMasterId id="2147483997" r:id="rId1"/>
   </p:sldMasterIdLst>
   <p:notesMasterIdLst>
-    <p:notesMasterId r:id="rId16"/>
+    <p:notesMasterId r:id="rId17"/>
   </p:notesMasterIdLst>
   <p:sldIdLst>
     <p:sldId id="370" r:id="rId2"/>
@@ -22,6 +22,7 @@
     <p:sldId id="381" r:id="rId13"/>
     <p:sldId id="382" r:id="rId14"/>
     <p:sldId id="383" r:id="rId15"/>
+    <p:sldId id="384" r:id="rId16"/>
   </p:sldIdLst>
   <p:sldSz cx="12192000" cy="6858000"/>
   <p:notesSz cx="6858000" cy="9144000"/>
@@ -210,7 +211,7 @@
           <a:p>
             <a:fld id="{E3AAD89A-DE75-490E-B3B8-DA645685EB5B}" type="datetimeFigureOut">
               <a:rPr lang="en-US" smtClean="0"/>
-              <a:t>8/25/2025</a:t>
+              <a:t>9/18/2026</a:t>
             </a:fld>
             <a:endParaRPr lang="en-US"/>
           </a:p>
@@ -565,6 +566,125 @@
 </p:notes>
 </file>
 
+<file path=ppt/notesSlides/notesSlide10.xml><?xml version="1.0" encoding="utf-8"?>
+<p:notes xmlns:a="http://schemas.openxmlformats.org/drawingml/2006/main" xmlns:r="http://schemas.openxmlformats.org/officeDocument/2006/relationships" xmlns:p="http://schemas.openxmlformats.org/presentationml/2006/main">
+  <p:cSld>
+    <p:spTree>
+      <p:nvGrpSpPr>
+        <p:cNvPr id="1" name=""/>
+        <p:cNvGrpSpPr/>
+        <p:nvPr/>
+      </p:nvGrpSpPr>
+      <p:grpSpPr>
+        <a:xfrm>
+          <a:off x="0" y="0"/>
+          <a:ext cx="0" cy="0"/>
+          <a:chOff x="0" y="0"/>
+          <a:chExt cx="0" cy="0"/>
+        </a:xfrm>
+      </p:grpSpPr>
+      <p:sp>
+        <p:nvSpPr>
+          <p:cNvPr id="2" name="Slide Image Placeholder 1"/>
+          <p:cNvSpPr>
+            <a:spLocks noGrp="1" noRot="1" noChangeAspect="1"/>
+          </p:cNvSpPr>
+          <p:nvPr>
+            <p:ph type="sldImg"/>
+          </p:nvPr>
+        </p:nvSpPr>
+        <p:spPr/>
+      </p:sp>
+      <p:sp>
+        <p:nvSpPr>
+          <p:cNvPr id="3" name="Notes Placeholder 2"/>
+          <p:cNvSpPr>
+            <a:spLocks noGrp="1"/>
+          </p:cNvSpPr>
+          <p:nvPr>
+            <p:ph type="body" idx="1"/>
+          </p:nvPr>
+        </p:nvSpPr>
+        <p:spPr/>
+        <p:txBody>
+          <a:bodyPr/>
+          <a:lstStyle/>
+          <a:p>
+            <a:pPr marL="0" marR="0" lvl="0" indent="0" algn="l" defTabSz="914400" rtl="0" eaLnBrk="1" fontAlgn="auto" latinLnBrk="0" hangingPunct="1">
+              <a:lnSpc>
+                <a:spcPct val="100000"/>
+              </a:lnSpc>
+              <a:spcBef>
+                <a:spcPts val="0"/>
+              </a:spcBef>
+              <a:spcAft>
+                <a:spcPts val="0"/>
+              </a:spcAft>
+              <a:buClrTx/>
+              <a:buSzTx/>
+              <a:buFontTx/>
+              <a:buNone/>
+              <a:tabLst/>
+              <a:defRPr/>
+            </a:pPr>
+            <a:r>
+              <a:rPr lang="en-US" sz="1200" b="0" i="0" kern="1200" dirty="0" smtClean="0">
+                <a:solidFill>
+                  <a:schemeClr val="tx1"/>
+                </a:solidFill>
+                <a:effectLst/>
+                <a:latin typeface="+mn-lt"/>
+                <a:ea typeface="+mn-ea"/>
+                <a:cs typeface="+mn-cs"/>
+              </a:rPr>
+              <a:t>OpenStack Multi-Node Installation | Control, Network &amp; Compute</a:t>
+            </a:r>
+          </a:p>
+          <a:p>
+            <a:r>
+              <a:rPr lang="en-US" dirty="0" smtClean="0"/>
+              <a:t>https://us.nttdata.com/en/blog/2014/april/openstack-multi-node-installation-control-network-and-compute</a:t>
+            </a:r>
+            <a:endParaRPr lang="en-US" dirty="0"/>
+          </a:p>
+        </p:txBody>
+      </p:sp>
+      <p:sp>
+        <p:nvSpPr>
+          <p:cNvPr id="4" name="Slide Number Placeholder 3"/>
+          <p:cNvSpPr>
+            <a:spLocks noGrp="1"/>
+          </p:cNvSpPr>
+          <p:nvPr>
+            <p:ph type="sldNum" sz="quarter" idx="10"/>
+          </p:nvPr>
+        </p:nvSpPr>
+        <p:spPr/>
+        <p:txBody>
+          <a:bodyPr/>
+          <a:lstStyle/>
+          <a:p>
+            <a:fld id="{F4A2648F-4152-4278-B136-F77E8E2B334A}" type="slidenum">
+              <a:rPr lang="en-US" smtClean="0"/>
+              <a:t>15</a:t>
+            </a:fld>
+            <a:endParaRPr lang="en-US"/>
+          </a:p>
+        </p:txBody>
+      </p:sp>
+    </p:spTree>
+    <p:extLst>
+      <p:ext uri="{BB962C8B-B14F-4D97-AF65-F5344CB8AC3E}">
+        <p14:creationId xmlns:p14="http://schemas.microsoft.com/office/powerpoint/2010/main" val="2045164541"/>
+      </p:ext>
+    </p:extLst>
+  </p:cSld>
+  <p:clrMapOvr>
+    <a:masterClrMapping/>
+  </p:clrMapOvr>
+</p:notes>
+</file>
+
 <file path=ppt/notesSlides/notesSlide2.xml><?xml version="1.0" encoding="utf-8"?>
 <p:notes xmlns:a="http://schemas.openxmlformats.org/drawingml/2006/main" xmlns:r="http://schemas.openxmlformats.org/officeDocument/2006/relationships" xmlns:p="http://schemas.openxmlformats.org/presentationml/2006/main">
   <p:cSld>
@@ -2328,7 +2448,7 @@
           <a:p>
             <a:fld id="{B6D41BCC-AD73-4203-A5A6-E62EB28B0FE6}" type="datetimeFigureOut">
               <a:rPr lang="en-US" smtClean="0"/>
-              <a:t>8/25/2025</a:t>
+              <a:t>9/18/2026</a:t>
             </a:fld>
             <a:endParaRPr lang="en-US"/>
           </a:p>
@@ -2498,7 +2618,7 @@
           <a:p>
             <a:fld id="{B6D41BCC-AD73-4203-A5A6-E62EB28B0FE6}" type="datetimeFigureOut">
               <a:rPr lang="en-US" smtClean="0"/>
-              <a:t>8/25/2025</a:t>
+              <a:t>9/18/2026</a:t>
             </a:fld>
             <a:endParaRPr lang="en-US"/>
           </a:p>
@@ -2678,7 +2798,7 @@
           <a:p>
             <a:fld id="{B6D41BCC-AD73-4203-A5A6-E62EB28B0FE6}" type="datetimeFigureOut">
               <a:rPr lang="en-US" smtClean="0"/>
-              <a:t>8/25/2025</a:t>
+              <a:t>9/18/2026</a:t>
             </a:fld>
             <a:endParaRPr lang="en-US"/>
           </a:p>
@@ -2848,7 +2968,7 @@
           <a:p>
             <a:fld id="{B6D41BCC-AD73-4203-A5A6-E62EB28B0FE6}" type="datetimeFigureOut">
               <a:rPr lang="en-US" smtClean="0"/>
-              <a:t>8/25/2025</a:t>
+              <a:t>9/18/2026</a:t>
             </a:fld>
             <a:endParaRPr lang="en-US"/>
           </a:p>
@@ -3094,7 +3214,7 @@
           <a:p>
             <a:fld id="{B6D41BCC-AD73-4203-A5A6-E62EB28B0FE6}" type="datetimeFigureOut">
               <a:rPr lang="en-US" smtClean="0"/>
-              <a:t>8/25/2025</a:t>
+              <a:t>9/18/2026</a:t>
             </a:fld>
             <a:endParaRPr lang="en-US"/>
           </a:p>
@@ -3326,7 +3446,7 @@
           <a:p>
             <a:fld id="{B6D41BCC-AD73-4203-A5A6-E62EB28B0FE6}" type="datetimeFigureOut">
               <a:rPr lang="en-US" smtClean="0"/>
-              <a:t>8/25/2025</a:t>
+              <a:t>9/18/2026</a:t>
             </a:fld>
             <a:endParaRPr lang="en-US"/>
           </a:p>
@@ -3693,7 +3813,7 @@
           <a:p>
             <a:fld id="{B6D41BCC-AD73-4203-A5A6-E62EB28B0FE6}" type="datetimeFigureOut">
               <a:rPr lang="en-US" smtClean="0"/>
-              <a:t>8/25/2025</a:t>
+              <a:t>9/18/2026</a:t>
             </a:fld>
             <a:endParaRPr lang="en-US"/>
           </a:p>
@@ -3811,7 +3931,7 @@
           <a:p>
             <a:fld id="{B6D41BCC-AD73-4203-A5A6-E62EB28B0FE6}" type="datetimeFigureOut">
               <a:rPr lang="en-US" smtClean="0"/>
-              <a:t>8/25/2025</a:t>
+              <a:t>9/18/2026</a:t>
             </a:fld>
             <a:endParaRPr lang="en-US"/>
           </a:p>
@@ -3906,7 +4026,7 @@
           <a:p>
             <a:fld id="{B6D41BCC-AD73-4203-A5A6-E62EB28B0FE6}" type="datetimeFigureOut">
               <a:rPr lang="en-US" smtClean="0"/>
-              <a:t>8/25/2025</a:t>
+              <a:t>9/18/2026</a:t>
             </a:fld>
             <a:endParaRPr lang="en-US"/>
           </a:p>
@@ -4183,7 +4303,7 @@
           <a:p>
             <a:fld id="{B6D41BCC-AD73-4203-A5A6-E62EB28B0FE6}" type="datetimeFigureOut">
               <a:rPr lang="en-US" smtClean="0"/>
-              <a:t>8/25/2025</a:t>
+              <a:t>9/18/2026</a:t>
             </a:fld>
             <a:endParaRPr lang="en-US"/>
           </a:p>
@@ -4436,7 +4556,7 @@
           <a:p>
             <a:fld id="{B6D41BCC-AD73-4203-A5A6-E62EB28B0FE6}" type="datetimeFigureOut">
               <a:rPr lang="en-US" smtClean="0"/>
-              <a:t>8/25/2025</a:t>
+              <a:t>9/18/2026</a:t>
             </a:fld>
             <a:endParaRPr lang="en-US"/>
           </a:p>
@@ -4650,7 +4770,7 @@
             <a:fld id="{B6D41BCC-AD73-4203-A5A6-E62EB28B0FE6}" type="datetimeFigureOut">
               <a:rPr lang="en-US" smtClean="0"/>
               <a:pPr/>
-              <a:t>8/25/2025</a:t>
+              <a:t>9/18/2026</a:t>
             </a:fld>
             <a:endParaRPr lang="en-US"/>
           </a:p>
@@ -6439,95 +6559,6 @@
           </p:txBody>
         </p:sp>
       </p:grpSp>
-      <p:sp>
-        <p:nvSpPr>
-          <p:cNvPr id="22" name="Rectangle 21"/>
-          <p:cNvSpPr/>
-          <p:nvPr/>
-        </p:nvSpPr>
-        <p:spPr>
-          <a:xfrm>
-            <a:off x="8911525" y="5781051"/>
-            <a:ext cx="3485015" cy="276999"/>
-          </a:xfrm>
-          <a:prstGeom prst="rect">
-            <a:avLst/>
-          </a:prstGeom>
-        </p:spPr>
-        <p:txBody>
-          <a:bodyPr wrap="square">
-            <a:spAutoFit/>
-          </a:bodyPr>
-          <a:lstStyle/>
-          <a:p>
-            <a:r>
-              <a:rPr lang="en-US" sz="1200" dirty="0"/>
-              <a:t>https://www.youtube.com/@AmelOline/videos</a:t>
-            </a:r>
-          </a:p>
-        </p:txBody>
-      </p:sp>
-      <p:sp>
-        <p:nvSpPr>
-          <p:cNvPr id="23" name="Rectangle 22"/>
-          <p:cNvSpPr/>
-          <p:nvPr/>
-        </p:nvSpPr>
-        <p:spPr>
-          <a:xfrm>
-            <a:off x="10027402" y="5596385"/>
-            <a:ext cx="2164597" cy="276999"/>
-          </a:xfrm>
-          <a:prstGeom prst="rect">
-            <a:avLst/>
-          </a:prstGeom>
-        </p:spPr>
-        <p:txBody>
-          <a:bodyPr wrap="square">
-            <a:spAutoFit/>
-          </a:bodyPr>
-          <a:lstStyle/>
-          <a:p>
-            <a:r>
-              <a:rPr lang="en-US" sz="1200" dirty="0"/>
-              <a:t>https://github.com/siagianp</a:t>
-            </a:r>
-          </a:p>
-        </p:txBody>
-      </p:sp>
-      <p:sp>
-        <p:nvSpPr>
-          <p:cNvPr id="2" name="Rectangle 1"/>
-          <p:cNvSpPr/>
-          <p:nvPr/>
-        </p:nvSpPr>
-        <p:spPr>
-          <a:xfrm>
-            <a:off x="7609668" y="5965717"/>
-            <a:ext cx="4889592" cy="276999"/>
-          </a:xfrm>
-          <a:prstGeom prst="rect">
-            <a:avLst/>
-          </a:prstGeom>
-        </p:spPr>
-        <p:txBody>
-          <a:bodyPr wrap="square">
-            <a:spAutoFit/>
-          </a:bodyPr>
-          <a:lstStyle/>
-          <a:p>
-            <a:r>
-              <a:rPr lang="en-US" sz="1200" dirty="0"/>
-              <a:t>https</a:t>
-            </a:r>
-            <a:r>
-              <a:rPr lang="en-US" sz="1200" dirty="0" smtClean="0"/>
-              <a:t>://github.com/amelcharolinesgn2/IoT_simulator-mqtt-NodeRed</a:t>
-            </a:r>
-            <a:endParaRPr lang="en-US" sz="1200" dirty="0"/>
-          </a:p>
-        </p:txBody>
-      </p:sp>
       <p:pic>
         <p:nvPicPr>
           <p:cNvPr id="4" name="Picture 3"/>
@@ -6610,7 +6641,7 @@
         </p:nvSpPr>
         <p:spPr>
           <a:xfrm>
-            <a:off x="3138827" y="3783967"/>
+            <a:off x="3185719" y="4648215"/>
             <a:ext cx="5287688" cy="521075"/>
           </a:xfrm>
           <a:prstGeom prst="rect">
@@ -6863,14 +6894,72 @@
       </p:sp>
       <p:sp>
         <p:nvSpPr>
-          <p:cNvPr id="3" name="Rectangle 2"/>
+          <p:cNvPr id="24" name="Rectangle 23"/>
           <p:cNvSpPr/>
           <p:nvPr/>
         </p:nvSpPr>
         <p:spPr>
           <a:xfrm>
-            <a:off x="8203920" y="6150383"/>
-            <a:ext cx="3988079" cy="276999"/>
+            <a:off x="10232087" y="6021831"/>
+            <a:ext cx="1301349" cy="150490"/>
+          </a:xfrm>
+          <a:prstGeom prst="rect">
+            <a:avLst/>
+          </a:prstGeom>
+        </p:spPr>
+        <p:txBody>
+          <a:bodyPr wrap="square">
+            <a:spAutoFit/>
+          </a:bodyPr>
+          <a:lstStyle/>
+          <a:p>
+            <a:pPr algn="r"/>
+            <a:r>
+              <a:rPr lang="en-US" sz="378" dirty="0"/>
+              <a:t>https://www.youtube.com/@AmelOline/videos</a:t>
+            </a:r>
+          </a:p>
+        </p:txBody>
+      </p:sp>
+      <p:sp>
+        <p:nvSpPr>
+          <p:cNvPr id="25" name="Rectangle 24"/>
+          <p:cNvSpPr/>
+          <p:nvPr/>
+        </p:nvSpPr>
+        <p:spPr>
+          <a:xfrm>
+            <a:off x="10644658" y="5959531"/>
+            <a:ext cx="879077" cy="150490"/>
+          </a:xfrm>
+          <a:prstGeom prst="rect">
+            <a:avLst/>
+          </a:prstGeom>
+        </p:spPr>
+        <p:txBody>
+          <a:bodyPr wrap="square">
+            <a:spAutoFit/>
+          </a:bodyPr>
+          <a:lstStyle/>
+          <a:p>
+            <a:pPr algn="r"/>
+            <a:r>
+              <a:rPr lang="en-US" sz="378" dirty="0"/>
+              <a:t>https://github.com/siagianp</a:t>
+            </a:r>
+          </a:p>
+        </p:txBody>
+      </p:sp>
+      <p:sp>
+        <p:nvSpPr>
+          <p:cNvPr id="28" name="Rectangle 27"/>
+          <p:cNvSpPr/>
+          <p:nvPr/>
+        </p:nvSpPr>
+        <p:spPr>
+          <a:xfrm>
+            <a:off x="10081355" y="6093430"/>
+            <a:ext cx="1452642" cy="150490"/>
           </a:xfrm>
           <a:prstGeom prst="rect">
             <a:avLst/>
@@ -6882,9 +6971,132 @@
           </a:bodyPr>
           <a:lstStyle/>
           <a:p>
-            <a:r>
-              <a:rPr lang="en-US" sz="1200" dirty="0"/>
+            <a:pPr algn="r"/>
+            <a:r>
+              <a:rPr lang="en-US" sz="378" dirty="0"/>
               <a:t>https://github.com/amelcharolinesgn2/Cloud-Infrastructures</a:t>
+            </a:r>
+          </a:p>
+        </p:txBody>
+      </p:sp>
+      <p:sp>
+        <p:nvSpPr>
+          <p:cNvPr id="29" name="Rectangle 28"/>
+          <p:cNvSpPr/>
+          <p:nvPr/>
+        </p:nvSpPr>
+        <p:spPr>
+          <a:xfrm>
+            <a:off x="9815257" y="6157456"/>
+            <a:ext cx="1718740" cy="150490"/>
+          </a:xfrm>
+          <a:prstGeom prst="rect">
+            <a:avLst/>
+          </a:prstGeom>
+        </p:spPr>
+        <p:txBody>
+          <a:bodyPr wrap="none">
+            <a:spAutoFit/>
+          </a:bodyPr>
+          <a:lstStyle/>
+          <a:p>
+            <a:pPr algn="r"/>
+            <a:r>
+              <a:rPr lang="en-US" sz="378" dirty="0"/>
+              <a:t>https://github.com/amelcharolinesgn2/ClouD-Infrastructure-SISKA-2025</a:t>
+            </a:r>
+          </a:p>
+        </p:txBody>
+      </p:sp>
+      <p:sp>
+        <p:nvSpPr>
+          <p:cNvPr id="30" name="Rectangle 29"/>
+          <p:cNvSpPr/>
+          <p:nvPr/>
+        </p:nvSpPr>
+        <p:spPr>
+          <a:xfrm>
+            <a:off x="10232087" y="6208399"/>
+            <a:ext cx="1301349" cy="150490"/>
+          </a:xfrm>
+          <a:prstGeom prst="rect">
+            <a:avLst/>
+          </a:prstGeom>
+        </p:spPr>
+        <p:txBody>
+          <a:bodyPr wrap="square">
+            <a:spAutoFit/>
+          </a:bodyPr>
+          <a:lstStyle/>
+          <a:p>
+            <a:pPr algn="r"/>
+            <a:r>
+              <a:rPr lang="en-US" sz="378" dirty="0"/>
+              <a:t>https://github.com/amelcharolinesgn2/CCNA1</a:t>
+            </a:r>
+          </a:p>
+        </p:txBody>
+      </p:sp>
+      <p:sp>
+        <p:nvSpPr>
+          <p:cNvPr id="31" name="Rectangle 30"/>
+          <p:cNvSpPr/>
+          <p:nvPr/>
+        </p:nvSpPr>
+        <p:spPr>
+          <a:xfrm>
+            <a:off x="10232087" y="6270079"/>
+            <a:ext cx="1301349" cy="150490"/>
+          </a:xfrm>
+          <a:prstGeom prst="rect">
+            <a:avLst/>
+          </a:prstGeom>
+        </p:spPr>
+        <p:txBody>
+          <a:bodyPr wrap="square">
+            <a:spAutoFit/>
+          </a:bodyPr>
+          <a:lstStyle/>
+          <a:p>
+            <a:pPr algn="r"/>
+            <a:r>
+              <a:rPr lang="en-US" sz="378" dirty="0"/>
+              <a:t>https://github.com/amelcharolinesgn2/CCNA2</a:t>
+            </a:r>
+          </a:p>
+        </p:txBody>
+      </p:sp>
+      <p:sp>
+        <p:nvSpPr>
+          <p:cNvPr id="32" name="Rectangle 31"/>
+          <p:cNvSpPr/>
+          <p:nvPr/>
+        </p:nvSpPr>
+        <p:spPr>
+          <a:xfrm>
+            <a:off x="10232087" y="6316676"/>
+            <a:ext cx="1301349" cy="208647"/>
+          </a:xfrm>
+          <a:prstGeom prst="rect">
+            <a:avLst/>
+          </a:prstGeom>
+        </p:spPr>
+        <p:txBody>
+          <a:bodyPr wrap="square">
+            <a:spAutoFit/>
+          </a:bodyPr>
+          <a:lstStyle/>
+          <a:p>
+            <a:pPr algn="r"/>
+            <a:r>
+              <a:rPr lang="en-US" sz="378" dirty="0">
+                <a:hlinkClick r:id="rId8"/>
+              </a:rPr>
+              <a:t>https://github.com/amelcharolinesgn2/AWS</a:t>
+            </a:r>
+            <a:r>
+              <a:rPr lang="en-US" sz="378" dirty="0"/>
+              <a:t> Certificate</a:t>
             </a:r>
           </a:p>
         </p:txBody>
@@ -7233,13 +7445,20 @@
             <p:ph type="title"/>
           </p:nvPr>
         </p:nvSpPr>
-        <p:spPr/>
+        <p:spPr>
+          <a:xfrm>
+            <a:off x="252047" y="6597527"/>
+            <a:ext cx="7907215" cy="260473"/>
+          </a:xfrm>
+        </p:spPr>
         <p:txBody>
-          <a:bodyPr/>
+          <a:bodyPr>
+            <a:normAutofit/>
+          </a:bodyPr>
           <a:lstStyle/>
           <a:p>
             <a:r>
-              <a:rPr lang="en-US" dirty="0"/>
+              <a:rPr lang="en-US" sz="800" dirty="0"/>
               <a:t>https://github.com/cybermnemosyne/cits5503</a:t>
             </a:r>
           </a:p>
@@ -8951,6 +9170,180 @@
     <p:extLst>
       <p:ext uri="{BB962C8B-B14F-4D97-AF65-F5344CB8AC3E}">
         <p14:creationId xmlns:p14="http://schemas.microsoft.com/office/powerpoint/2010/main" val="3939557997"/>
+      </p:ext>
+    </p:extLst>
+  </p:cSld>
+  <p:clrMapOvr>
+    <a:masterClrMapping/>
+  </p:clrMapOvr>
+  <p:timing>
+    <p:tnLst>
+      <p:par>
+        <p:cTn id="1" dur="indefinite" restart="never" nodeType="tmRoot"/>
+      </p:par>
+    </p:tnLst>
+  </p:timing>
+</p:sld>
+</file>
+
+<file path=ppt/slides/slide15.xml><?xml version="1.0" encoding="utf-8"?>
+<p:sld xmlns:a="http://schemas.openxmlformats.org/drawingml/2006/main" xmlns:r="http://schemas.openxmlformats.org/officeDocument/2006/relationships" xmlns:p="http://schemas.openxmlformats.org/presentationml/2006/main">
+  <p:cSld>
+    <p:spTree>
+      <p:nvGrpSpPr>
+        <p:cNvPr id="1" name=""/>
+        <p:cNvGrpSpPr/>
+        <p:nvPr/>
+      </p:nvGrpSpPr>
+      <p:grpSpPr>
+        <a:xfrm>
+          <a:off x="0" y="0"/>
+          <a:ext cx="0" cy="0"/>
+          <a:chOff x="0" y="0"/>
+          <a:chExt cx="0" cy="0"/>
+        </a:xfrm>
+      </p:grpSpPr>
+      <p:sp>
+        <p:nvSpPr>
+          <p:cNvPr id="2" name="Title 1"/>
+          <p:cNvSpPr>
+            <a:spLocks noGrp="1"/>
+          </p:cNvSpPr>
+          <p:nvPr>
+            <p:ph type="title"/>
+          </p:nvPr>
+        </p:nvSpPr>
+        <p:spPr/>
+        <p:txBody>
+          <a:bodyPr>
+            <a:normAutofit fontScale="90000"/>
+          </a:bodyPr>
+          <a:lstStyle/>
+          <a:p>
+            <a:r>
+              <a:rPr lang="en-US" dirty="0"/>
+              <a:t>OpenStack Multi-Node Installation | Control, Network &amp; Compute</a:t>
+            </a:r>
+            <a:br>
+              <a:rPr lang="en-US" dirty="0"/>
+            </a:br>
+            <a:endParaRPr lang="en-US" sz="2000" dirty="0"/>
+          </a:p>
+        </p:txBody>
+      </p:sp>
+      <p:sp>
+        <p:nvSpPr>
+          <p:cNvPr id="3" name="Content Placeholder 2"/>
+          <p:cNvSpPr>
+            <a:spLocks noGrp="1"/>
+          </p:cNvSpPr>
+          <p:nvPr>
+            <p:ph idx="1"/>
+          </p:nvPr>
+        </p:nvSpPr>
+        <p:spPr>
+          <a:xfrm>
+            <a:off x="838200" y="1825625"/>
+            <a:ext cx="11353800" cy="4351338"/>
+          </a:xfrm>
+        </p:spPr>
+        <p:txBody>
+          <a:bodyPr/>
+          <a:lstStyle/>
+          <a:p>
+            <a:r>
+              <a:rPr lang="en-US" dirty="0" smtClean="0"/>
+              <a:t>Network ::&gt; </a:t>
+            </a:r>
+            <a:r>
+              <a:rPr lang="en-US" sz="1600" b="1" dirty="0" smtClean="0">
+                <a:solidFill>
+                  <a:srgbClr val="0070C0"/>
+                </a:solidFill>
+              </a:rPr>
+              <a:t>Compute Node</a:t>
+            </a:r>
+            <a:r>
+              <a:rPr lang="en-US" sz="1600" dirty="0" smtClean="0"/>
+              <a:t>:: </a:t>
+            </a:r>
+            <a:r>
+              <a:rPr lang="en-US" sz="1600" dirty="0" err="1" smtClean="0">
+                <a:solidFill>
+                  <a:srgbClr val="1A9626"/>
+                </a:solidFill>
+              </a:rPr>
+              <a:t>TwoNetInterface</a:t>
+            </a:r>
+            <a:r>
+              <a:rPr lang="en-US" sz="1600" dirty="0" smtClean="0">
+                <a:solidFill>
+                  <a:srgbClr val="1A9626"/>
+                </a:solidFill>
+              </a:rPr>
+              <a:t>(external net, Management net)</a:t>
+            </a:r>
+          </a:p>
+          <a:p>
+            <a:pPr marL="1828800" lvl="4" indent="0">
+              <a:buNone/>
+            </a:pPr>
+            <a:r>
+              <a:rPr lang="en-US" sz="1600" b="1" dirty="0" smtClean="0">
+                <a:solidFill>
+                  <a:srgbClr val="0070C0"/>
+                </a:solidFill>
+              </a:rPr>
+              <a:t>    Network Node</a:t>
+            </a:r>
+            <a:r>
+              <a:rPr lang="en-US" sz="1600" dirty="0"/>
+              <a:t>:: </a:t>
+            </a:r>
+            <a:r>
+              <a:rPr lang="en-US" sz="1600" dirty="0" err="1" smtClean="0">
+                <a:solidFill>
+                  <a:srgbClr val="1A9626"/>
+                </a:solidFill>
+              </a:rPr>
+              <a:t>ThreeNetInterface</a:t>
+            </a:r>
+            <a:r>
+              <a:rPr lang="en-US" sz="1600" dirty="0" smtClean="0">
+                <a:solidFill>
+                  <a:srgbClr val="1A9626"/>
+                </a:solidFill>
+              </a:rPr>
+              <a:t>(external </a:t>
+            </a:r>
+            <a:r>
+              <a:rPr lang="en-US" sz="1600" dirty="0">
+                <a:solidFill>
+                  <a:srgbClr val="1A9626"/>
+                </a:solidFill>
+              </a:rPr>
+              <a:t>net, Management </a:t>
+            </a:r>
+            <a:r>
+              <a:rPr lang="en-US" sz="1600" dirty="0" smtClean="0">
+                <a:solidFill>
+                  <a:srgbClr val="1A9626"/>
+                </a:solidFill>
+              </a:rPr>
+              <a:t>net, Data net)</a:t>
+            </a:r>
+            <a:endParaRPr lang="en-US" sz="1600" dirty="0">
+              <a:solidFill>
+                <a:srgbClr val="1A9626"/>
+              </a:solidFill>
+            </a:endParaRPr>
+          </a:p>
+        </p:txBody>
+      </p:sp>
+    </p:spTree>
+    <p:extLst>
+      <p:ext uri="{BB962C8B-B14F-4D97-AF65-F5344CB8AC3E}">
+        <p14:creationId xmlns:p14="http://schemas.microsoft.com/office/powerpoint/2010/main" val="63083204"/>
       </p:ext>
     </p:extLst>
   </p:cSld>
